--- a/Data Analyst.pptx
+++ b/Data Analyst.pptx
@@ -107,6 +107,11 @@
       </a:defRPr>
     </a:lvl9pPr>
   </p:defaultTextStyle>
+  <p:extLst>
+    <p:ext uri="{EFAFB233-063F-42B5-8137-9DF3F51BA10A}">
+      <p15:sldGuideLst xmlns:p15="http://schemas.microsoft.com/office/powerpoint/2012/main"/>
+    </p:ext>
+  </p:extLst>
 </p:presentation>
 </file>
 
@@ -4022,7 +4027,7 @@
           <a:p>
             <a:fld id="{4607FAC7-2379-44F9-A937-64B47D37C7B7}" type="datetimeFigureOut">
               <a:rPr lang="en-GB" smtClean="0"/>
-              <a:t>26/03/2025</a:t>
+              <a:t>27/03/2025</a:t>
             </a:fld>
             <a:endParaRPr lang="en-GB"/>
           </a:p>
@@ -4222,7 +4227,7 @@
           <a:p>
             <a:fld id="{4607FAC7-2379-44F9-A937-64B47D37C7B7}" type="datetimeFigureOut">
               <a:rPr lang="en-GB" smtClean="0"/>
-              <a:t>26/03/2025</a:t>
+              <a:t>27/03/2025</a:t>
             </a:fld>
             <a:endParaRPr lang="en-GB"/>
           </a:p>
@@ -4432,7 +4437,7 @@
           <a:p>
             <a:fld id="{4607FAC7-2379-44F9-A937-64B47D37C7B7}" type="datetimeFigureOut">
               <a:rPr lang="en-GB" smtClean="0"/>
-              <a:t>26/03/2025</a:t>
+              <a:t>27/03/2025</a:t>
             </a:fld>
             <a:endParaRPr lang="en-GB"/>
           </a:p>
@@ -4632,7 +4637,7 @@
           <a:p>
             <a:fld id="{4607FAC7-2379-44F9-A937-64B47D37C7B7}" type="datetimeFigureOut">
               <a:rPr lang="en-GB" smtClean="0"/>
-              <a:t>26/03/2025</a:t>
+              <a:t>27/03/2025</a:t>
             </a:fld>
             <a:endParaRPr lang="en-GB"/>
           </a:p>
@@ -4908,7 +4913,7 @@
           <a:p>
             <a:fld id="{4607FAC7-2379-44F9-A937-64B47D37C7B7}" type="datetimeFigureOut">
               <a:rPr lang="en-GB" smtClean="0"/>
-              <a:t>26/03/2025</a:t>
+              <a:t>27/03/2025</a:t>
             </a:fld>
             <a:endParaRPr lang="en-GB"/>
           </a:p>
@@ -5176,7 +5181,7 @@
           <a:p>
             <a:fld id="{4607FAC7-2379-44F9-A937-64B47D37C7B7}" type="datetimeFigureOut">
               <a:rPr lang="en-GB" smtClean="0"/>
-              <a:t>26/03/2025</a:t>
+              <a:t>27/03/2025</a:t>
             </a:fld>
             <a:endParaRPr lang="en-GB"/>
           </a:p>
@@ -5591,7 +5596,7 @@
           <a:p>
             <a:fld id="{4607FAC7-2379-44F9-A937-64B47D37C7B7}" type="datetimeFigureOut">
               <a:rPr lang="en-GB" smtClean="0"/>
-              <a:t>26/03/2025</a:t>
+              <a:t>27/03/2025</a:t>
             </a:fld>
             <a:endParaRPr lang="en-GB"/>
           </a:p>
@@ -5733,7 +5738,7 @@
           <a:p>
             <a:fld id="{4607FAC7-2379-44F9-A937-64B47D37C7B7}" type="datetimeFigureOut">
               <a:rPr lang="en-GB" smtClean="0"/>
-              <a:t>26/03/2025</a:t>
+              <a:t>27/03/2025</a:t>
             </a:fld>
             <a:endParaRPr lang="en-GB"/>
           </a:p>
@@ -5846,7 +5851,7 @@
           <a:p>
             <a:fld id="{4607FAC7-2379-44F9-A937-64B47D37C7B7}" type="datetimeFigureOut">
               <a:rPr lang="en-GB" smtClean="0"/>
-              <a:t>26/03/2025</a:t>
+              <a:t>27/03/2025</a:t>
             </a:fld>
             <a:endParaRPr lang="en-GB"/>
           </a:p>
@@ -6159,7 +6164,7 @@
           <a:p>
             <a:fld id="{4607FAC7-2379-44F9-A937-64B47D37C7B7}" type="datetimeFigureOut">
               <a:rPr lang="en-GB" smtClean="0"/>
-              <a:t>26/03/2025</a:t>
+              <a:t>27/03/2025</a:t>
             </a:fld>
             <a:endParaRPr lang="en-GB"/>
           </a:p>
@@ -6448,7 +6453,7 @@
           <a:p>
             <a:fld id="{4607FAC7-2379-44F9-A937-64B47D37C7B7}" type="datetimeFigureOut">
               <a:rPr lang="en-GB" smtClean="0"/>
-              <a:t>26/03/2025</a:t>
+              <a:t>27/03/2025</a:t>
             </a:fld>
             <a:endParaRPr lang="en-GB"/>
           </a:p>
@@ -6691,7 +6696,7 @@
           <a:p>
             <a:fld id="{4607FAC7-2379-44F9-A937-64B47D37C7B7}" type="datetimeFigureOut">
               <a:rPr lang="en-GB" smtClean="0"/>
-              <a:t>26/03/2025</a:t>
+              <a:t>27/03/2025</a:t>
             </a:fld>
             <a:endParaRPr lang="en-GB"/>
           </a:p>
